--- a/Crypto_vs_Traditional_Markets.pptx
+++ b/Crypto_vs_Traditional_Markets.pptx
@@ -16317,7 +16317,7 @@
         <p:spPr>
           <a:xfrm>
             <a:off x="274320" y="804672"/>
-            <a:ext cx="6492240" cy="3474720"/>
+            <a:ext cx="6492240" cy="3246120"/>
           </a:xfrm>
           <a:prstGeom prst="rect">
             <a:avLst/>
@@ -16332,7 +16332,7 @@
         </p:nvSpPr>
         <p:spPr>
           <a:xfrm>
-            <a:off x="6812280" y="960120"/>
+            <a:off x="6812280" y="896112"/>
             <a:ext cx="2011680" cy="896112"/>
           </a:xfrm>
           <a:prstGeom prst="rect">
@@ -16364,7 +16364,7 @@
         </p:nvSpPr>
         <p:spPr>
           <a:xfrm>
-            <a:off x="6812280" y="960120"/>
+            <a:off x="6812280" y="896112"/>
             <a:ext cx="54864" cy="896112"/>
           </a:xfrm>
           <a:prstGeom prst="rect">
@@ -16389,7 +16389,7 @@
         </p:nvSpPr>
         <p:spPr>
           <a:xfrm>
-            <a:off x="6922008" y="1014984"/>
+            <a:off x="6922008" y="950976"/>
             <a:ext cx="1828800" cy="256032"/>
           </a:xfrm>
           <a:prstGeom prst="rect">
@@ -16428,7 +16428,7 @@
         </p:nvSpPr>
         <p:spPr>
           <a:xfrm>
-            <a:off x="6922008" y="1289304"/>
+            <a:off x="6922008" y="1225296"/>
             <a:ext cx="1828800" cy="502920"/>
           </a:xfrm>
           <a:prstGeom prst="rect">
@@ -16467,7 +16467,7 @@
         </p:nvSpPr>
         <p:spPr>
           <a:xfrm>
-            <a:off x="6812280" y="2103120"/>
+            <a:off x="6812280" y="1965960"/>
             <a:ext cx="2011680" cy="896112"/>
           </a:xfrm>
           <a:prstGeom prst="rect">
@@ -16499,7 +16499,7 @@
         </p:nvSpPr>
         <p:spPr>
           <a:xfrm>
-            <a:off x="6812280" y="2103120"/>
+            <a:off x="6812280" y="1965960"/>
             <a:ext cx="54864" cy="896112"/>
           </a:xfrm>
           <a:prstGeom prst="rect">
@@ -16524,7 +16524,7 @@
         </p:nvSpPr>
         <p:spPr>
           <a:xfrm>
-            <a:off x="6922008" y="2157984"/>
+            <a:off x="6922008" y="2020824"/>
             <a:ext cx="1828800" cy="256032"/>
           </a:xfrm>
           <a:prstGeom prst="rect">
@@ -16563,7 +16563,7 @@
         </p:nvSpPr>
         <p:spPr>
           <a:xfrm>
-            <a:off x="6922008" y="2432304"/>
+            <a:off x="6922008" y="2295144"/>
             <a:ext cx="1828800" cy="502920"/>
           </a:xfrm>
           <a:prstGeom prst="rect">
@@ -16602,7 +16602,7 @@
         </p:nvSpPr>
         <p:spPr>
           <a:xfrm>
-            <a:off x="6812280" y="3246120"/>
+            <a:off x="6812280" y="3035808"/>
             <a:ext cx="2011680" cy="896112"/>
           </a:xfrm>
           <a:prstGeom prst="rect">
@@ -16634,7 +16634,7 @@
         </p:nvSpPr>
         <p:spPr>
           <a:xfrm>
-            <a:off x="6812280" y="3246120"/>
+            <a:off x="6812280" y="3035808"/>
             <a:ext cx="54864" cy="896112"/>
           </a:xfrm>
           <a:prstGeom prst="rect">
@@ -16659,7 +16659,7 @@
         </p:nvSpPr>
         <p:spPr>
           <a:xfrm>
-            <a:off x="6922008" y="3300984"/>
+            <a:off x="6922008" y="3090672"/>
             <a:ext cx="1828800" cy="256032"/>
           </a:xfrm>
           <a:prstGeom prst="rect">
@@ -16698,7 +16698,7 @@
         </p:nvSpPr>
         <p:spPr>
           <a:xfrm>
-            <a:off x="6922008" y="3575304"/>
+            <a:off x="6922008" y="3364992"/>
             <a:ext cx="1828800" cy="502920"/>
           </a:xfrm>
           <a:prstGeom prst="rect">
@@ -16745,8 +16745,8 @@
         </p:blipFill>
         <p:spPr>
           <a:xfrm>
-            <a:off x="274320" y="4315968"/>
-            <a:ext cx="8595360" cy="685800"/>
+            <a:off x="274320" y="4133088"/>
+            <a:ext cx="8595360" cy="868680"/>
           </a:xfrm>
           <a:prstGeom prst="rect">
             <a:avLst/>
